--- a/cpu/docs/presentations/output/RV32I_CPU_Bunea_Cosmin-Andrei.pptx
+++ b/cpu/docs/presentations/output/RV32I_CPU_Bunea_Cosmin-Andrei.pptx
@@ -2,19 +2,19 @@
 <file path=ppt/presentation.xml><?xml version="1.0" encoding="utf-8"?>
 <p:presentation xmlns:p="http://schemas.openxmlformats.org/presentationml/2006/main">
   <p:sldMasterIdLst>
-    <p:sldMasterId xmlns:r="http://schemas.openxmlformats.org/officeDocument/2006/relationships" id="2147483648" r:id="R7840c502c0324b5f"/>
+    <p:sldMasterId xmlns:r="http://schemas.openxmlformats.org/officeDocument/2006/relationships" id="2147483648" r:id="R2a3fe4702510457d"/>
   </p:sldMasterIdLst>
   <p:notesMasterIdLst>
-    <p:notesMasterId xmlns:r="http://schemas.openxmlformats.org/officeDocument/2006/relationships" r:id="Rc4c6af8bdc3e4864"/>
+    <p:notesMasterId xmlns:r="http://schemas.openxmlformats.org/officeDocument/2006/relationships" r:id="R4f581b1572944395"/>
   </p:notesMasterIdLst>
   <p:sldIdLst>
-    <p:sldId xmlns:r="http://schemas.openxmlformats.org/officeDocument/2006/relationships" id="256" r:id="Reb196273ed7c4a01"/>
-    <p:sldId xmlns:r="http://schemas.openxmlformats.org/officeDocument/2006/relationships" id="257" r:id="R20bd0ede62254183"/>
-    <p:sldId xmlns:r="http://schemas.openxmlformats.org/officeDocument/2006/relationships" id="258" r:id="R2e1ac497ba61491c"/>
-    <p:sldId xmlns:r="http://schemas.openxmlformats.org/officeDocument/2006/relationships" id="259" r:id="Rabe5d15ed77c4ce7"/>
-    <p:sldId xmlns:r="http://schemas.openxmlformats.org/officeDocument/2006/relationships" id="260" r:id="R5c5659c2022a462d"/>
-    <p:sldId xmlns:r="http://schemas.openxmlformats.org/officeDocument/2006/relationships" id="261" r:id="R9a262e99aa35467d"/>
-    <p:sldId xmlns:r="http://schemas.openxmlformats.org/officeDocument/2006/relationships" id="262" r:id="R9249cb7fe1664bce"/>
+    <p:sldId xmlns:r="http://schemas.openxmlformats.org/officeDocument/2006/relationships" id="256" r:id="R0746aecd52234c9c"/>
+    <p:sldId xmlns:r="http://schemas.openxmlformats.org/officeDocument/2006/relationships" id="257" r:id="Redc5066eed70409b"/>
+    <p:sldId xmlns:r="http://schemas.openxmlformats.org/officeDocument/2006/relationships" id="258" r:id="Rae095d71f7004f9a"/>
+    <p:sldId xmlns:r="http://schemas.openxmlformats.org/officeDocument/2006/relationships" id="259" r:id="Rf529722fee3c4988"/>
+    <p:sldId xmlns:r="http://schemas.openxmlformats.org/officeDocument/2006/relationships" id="260" r:id="R0f97fa34f47d45ac"/>
+    <p:sldId xmlns:r="http://schemas.openxmlformats.org/officeDocument/2006/relationships" id="261" r:id="Re79fc7216de54105"/>
+    <p:sldId xmlns:r="http://schemas.openxmlformats.org/officeDocument/2006/relationships" id="262" r:id="Rfdbc5c2d3a3b4c1f"/>
   </p:sldIdLst>
   <p:sldSz cx="18288000" cy="10287000"/>
   <p:notesSz cx="6858000" cy="9144000"/>
@@ -985,7 +985,7 @@
   </p:cSld>
   <p:clrMap bg1="lt1" tx1="dk1" bg2="lt2" tx2="dk2" accent1="accent1" accent2="accent2" accent3="accent3" accent4="accent4" accent5="accent5" accent6="accent6" hlink="hlink" folHlink="folHlink"/>
   <p:sldLayoutIdLst>
-    <p:sldLayoutId xmlns:r="http://schemas.openxmlformats.org/officeDocument/2006/relationships" id="2147483649" r:id="R27bd396bddce4bdd"/>
+    <p:sldLayoutId xmlns:r="http://schemas.openxmlformats.org/officeDocument/2006/relationships" id="2147483649" r:id="R8ff814069a544fb3"/>
   </p:sldLayoutIdLst>
   <p:txStyles>
     <p:titleStyle>
@@ -1284,7 +1284,7 @@
           <p:cNvPr id="1" name="text">
             <a:extLst xmlns:a="http://schemas.openxmlformats.org/drawingml/2006/main">
               <a:ext uri="{FF2B5EF4-FFF2-40B4-BE49-F238E27FC236}">
-                <a16:creationId xmlns:a16="http://schemas.microsoft.com/office/drawing/2014/main" id="{C7BF3CC1-1F53-4915-BE8B-02540E676D84}"/>
+                <a16:creationId xmlns:a16="http://schemas.microsoft.com/office/drawing/2014/main" id="{F094DB12-8778-405B-9559-DB25D0E276B0}"/>
               </a:ext>
             </a:extLst>
           </p:cNvPr>
@@ -1329,7 +1329,7 @@
           <p:cNvPr id="2" name="">
             <a:extLst xmlns:a="http://schemas.openxmlformats.org/drawingml/2006/main">
               <a:ext uri="{FF2B5EF4-FFF2-40B4-BE49-F238E27FC236}">
-                <a16:creationId xmlns:a16="http://schemas.microsoft.com/office/drawing/2014/main" id="{8DAB33EC-273E-4A4B-831B-040BB1BDBFD4}"/>
+                <a16:creationId xmlns:a16="http://schemas.microsoft.com/office/drawing/2014/main" id="{B0E1A270-1F98-47F0-BC69-5CBFE56C2E52}"/>
               </a:ext>
             </a:extLst>
           </p:cNvPr>
@@ -1362,7 +1362,7 @@
           <p:cNvPr id="3" name="text">
             <a:extLst xmlns:a="http://schemas.openxmlformats.org/drawingml/2006/main">
               <a:ext uri="{FF2B5EF4-FFF2-40B4-BE49-F238E27FC236}">
-                <a16:creationId xmlns:a16="http://schemas.microsoft.com/office/drawing/2014/main" id="{9F80ECF8-6930-4060-857D-0A424F9F7BFD}"/>
+                <a16:creationId xmlns:a16="http://schemas.microsoft.com/office/drawing/2014/main" id="{AFD4E032-3C0D-40EA-A9BE-54F888DE2856}"/>
               </a:ext>
             </a:extLst>
           </p:cNvPr>
@@ -1407,7 +1407,7 @@
           <p:cNvPr id="4" name="text">
             <a:extLst xmlns:a="http://schemas.openxmlformats.org/drawingml/2006/main">
               <a:ext uri="{FF2B5EF4-FFF2-40B4-BE49-F238E27FC236}">
-                <a16:creationId xmlns:a16="http://schemas.microsoft.com/office/drawing/2014/main" id="{DF932EFE-390E-4C94-A4CF-7C1FE7983E0F}"/>
+                <a16:creationId xmlns:a16="http://schemas.microsoft.com/office/drawing/2014/main" id="{0BD88A90-89E0-44CB-806F-83D3FEEDD485}"/>
               </a:ext>
             </a:extLst>
           </p:cNvPr>
@@ -1452,7 +1452,7 @@
           <p:cNvPr id="5" name="text">
             <a:extLst xmlns:a="http://schemas.openxmlformats.org/drawingml/2006/main">
               <a:ext uri="{FF2B5EF4-FFF2-40B4-BE49-F238E27FC236}">
-                <a16:creationId xmlns:a16="http://schemas.microsoft.com/office/drawing/2014/main" id="{CDF146B2-136B-4E39-897E-51EDC11E690F}"/>
+                <a16:creationId xmlns:a16="http://schemas.microsoft.com/office/drawing/2014/main" id="{ED46B7FC-150D-4365-B5FB-7EBEF5797D04}"/>
               </a:ext>
             </a:extLst>
           </p:cNvPr>
@@ -1497,7 +1497,7 @@
           <p:cNvPr id="6" name="text">
             <a:extLst xmlns:a="http://schemas.openxmlformats.org/drawingml/2006/main">
               <a:ext uri="{FF2B5EF4-FFF2-40B4-BE49-F238E27FC236}">
-                <a16:creationId xmlns:a16="http://schemas.microsoft.com/office/drawing/2014/main" id="{822D98F7-6840-46A5-B9E7-95BFFCD16164}"/>
+                <a16:creationId xmlns:a16="http://schemas.microsoft.com/office/drawing/2014/main" id="{34C152D1-F19F-4C12-B4B9-068CBEA9DE24}"/>
               </a:ext>
             </a:extLst>
           </p:cNvPr>
@@ -1542,7 +1542,7 @@
           <p:cNvPr id="7" name="text">
             <a:extLst xmlns:a="http://schemas.openxmlformats.org/drawingml/2006/main">
               <a:ext uri="{FF2B5EF4-FFF2-40B4-BE49-F238E27FC236}">
-                <a16:creationId xmlns:a16="http://schemas.microsoft.com/office/drawing/2014/main" id="{8EBDC348-7BD9-4B7B-B224-D842D5DE236B}"/>
+                <a16:creationId xmlns:a16="http://schemas.microsoft.com/office/drawing/2014/main" id="{D73F7834-C6A0-4611-88B4-D5F807231EB6}"/>
               </a:ext>
             </a:extLst>
           </p:cNvPr>
@@ -1587,7 +1587,7 @@
           <p:cNvPr id="8" name="text">
             <a:extLst xmlns:a="http://schemas.openxmlformats.org/drawingml/2006/main">
               <a:ext uri="{FF2B5EF4-FFF2-40B4-BE49-F238E27FC236}">
-                <a16:creationId xmlns:a16="http://schemas.microsoft.com/office/drawing/2014/main" id="{D44FDBD2-6DE1-4DAB-845D-2A0F6A1F573E}"/>
+                <a16:creationId xmlns:a16="http://schemas.microsoft.com/office/drawing/2014/main" id="{2BC7CDDE-EFF4-45EF-8966-064BDD61FB96}"/>
               </a:ext>
             </a:extLst>
           </p:cNvPr>
@@ -1632,7 +1632,7 @@
           <p:cNvPr id="9" name="text">
             <a:extLst xmlns:a="http://schemas.openxmlformats.org/drawingml/2006/main">
               <a:ext uri="{FF2B5EF4-FFF2-40B4-BE49-F238E27FC236}">
-                <a16:creationId xmlns:a16="http://schemas.microsoft.com/office/drawing/2014/main" id="{73169286-6CA1-4A4E-ACBF-38192A54A363}"/>
+                <a16:creationId xmlns:a16="http://schemas.microsoft.com/office/drawing/2014/main" id="{289C9C48-A0EE-4B84-9020-6869E49009AD}"/>
               </a:ext>
             </a:extLst>
           </p:cNvPr>
@@ -1677,7 +1677,7 @@
           <p:cNvPr id="10" name="text">
             <a:extLst xmlns:a="http://schemas.openxmlformats.org/drawingml/2006/main">
               <a:ext uri="{FF2B5EF4-FFF2-40B4-BE49-F238E27FC236}">
-                <a16:creationId xmlns:a16="http://schemas.microsoft.com/office/drawing/2014/main" id="{3B91CE06-23BE-4C25-B962-BFA16DFC13DE}"/>
+                <a16:creationId xmlns:a16="http://schemas.microsoft.com/office/drawing/2014/main" id="{79DF1157-100F-43D4-810C-E06A43BF1C88}"/>
               </a:ext>
             </a:extLst>
           </p:cNvPr>
@@ -1756,7 +1756,7 @@
           <p:cNvPr id="11" name="text">
             <a:extLst xmlns:a="http://schemas.openxmlformats.org/drawingml/2006/main">
               <a:ext uri="{FF2B5EF4-FFF2-40B4-BE49-F238E27FC236}">
-                <a16:creationId xmlns:a16="http://schemas.microsoft.com/office/drawing/2014/main" id="{8971B983-32F6-4874-85C6-F5EB1AD31395}"/>
+                <a16:creationId xmlns:a16="http://schemas.microsoft.com/office/drawing/2014/main" id="{F1E708E7-A577-4B93-B5FF-35E7FDB8DB77}"/>
               </a:ext>
             </a:extLst>
           </p:cNvPr>
@@ -1799,7 +1799,7 @@
     </p:spTree>
     <p:extLst>
       <p:ext uri="{BB962C8B-B14F-4D97-AF65-F5344CB8AC3E}">
-        <p14:creationId xmlns:p14="http://schemas.microsoft.com/office/powerpoint/2010/main" val="176681338"/>
+        <p14:creationId xmlns:p14="http://schemas.microsoft.com/office/powerpoint/2010/main" val="396071857"/>
       </p:ext>
     </p:extLst>
   </p:cSld>
@@ -1823,7 +1823,7 @@
           <p:cNvPr id="1" name="slide-title">
             <a:extLst xmlns:a="http://schemas.openxmlformats.org/drawingml/2006/main">
               <a:ext uri="{FF2B5EF4-FFF2-40B4-BE49-F238E27FC236}">
-                <a16:creationId xmlns:a16="http://schemas.microsoft.com/office/drawing/2014/main" id="{28949BAC-E03A-49CE-AABC-1F20994EE354}"/>
+                <a16:creationId xmlns:a16="http://schemas.microsoft.com/office/drawing/2014/main" id="{79A88450-2FB9-4038-B44C-BEB6436DC521}"/>
               </a:ext>
             </a:extLst>
           </p:cNvPr>
@@ -1868,7 +1868,7 @@
           <p:cNvPr id="2" name="">
             <a:extLst xmlns:a="http://schemas.openxmlformats.org/drawingml/2006/main">
               <a:ext uri="{FF2B5EF4-FFF2-40B4-BE49-F238E27FC236}">
-                <a16:creationId xmlns:a16="http://schemas.microsoft.com/office/drawing/2014/main" id="{FBA5F75A-24EB-4910-93ED-81BED8809428}"/>
+                <a16:creationId xmlns:a16="http://schemas.microsoft.com/office/drawing/2014/main" id="{1B0B2767-457D-45E7-BE3D-33020365D93E}"/>
               </a:ext>
             </a:extLst>
           </p:cNvPr>
@@ -1901,7 +1901,7 @@
           <p:cNvPr id="3" name="text">
             <a:extLst xmlns:a="http://schemas.openxmlformats.org/drawingml/2006/main">
               <a:ext uri="{FF2B5EF4-FFF2-40B4-BE49-F238E27FC236}">
-                <a16:creationId xmlns:a16="http://schemas.microsoft.com/office/drawing/2014/main" id="{C288B747-A952-4513-9D02-C4D5BB667A78}"/>
+                <a16:creationId xmlns:a16="http://schemas.microsoft.com/office/drawing/2014/main" id="{ADE70FF7-9E3F-4DB8-AE8E-1B847BB34160}"/>
               </a:ext>
             </a:extLst>
           </p:cNvPr>
@@ -1946,7 +1946,7 @@
           <p:cNvPr id="4" name="text">
             <a:extLst xmlns:a="http://schemas.openxmlformats.org/drawingml/2006/main">
               <a:ext uri="{FF2B5EF4-FFF2-40B4-BE49-F238E27FC236}">
-                <a16:creationId xmlns:a16="http://schemas.microsoft.com/office/drawing/2014/main" id="{C4E35A70-745F-4D23-A2E2-E27EFA82D004}"/>
+                <a16:creationId xmlns:a16="http://schemas.microsoft.com/office/drawing/2014/main" id="{DCF79C8B-A626-4A9F-8164-E13F8540C86C}"/>
               </a:ext>
             </a:extLst>
           </p:cNvPr>
@@ -1991,7 +1991,7 @@
           <p:cNvPr id="5" name="text">
             <a:extLst xmlns:a="http://schemas.openxmlformats.org/drawingml/2006/main">
               <a:ext uri="{FF2B5EF4-FFF2-40B4-BE49-F238E27FC236}">
-                <a16:creationId xmlns:a16="http://schemas.microsoft.com/office/drawing/2014/main" id="{4722B348-40B6-4F5C-B594-69F6B3C6C40B}"/>
+                <a16:creationId xmlns:a16="http://schemas.microsoft.com/office/drawing/2014/main" id="{7D506043-7AA9-4044-875B-6740BD106375}"/>
               </a:ext>
             </a:extLst>
           </p:cNvPr>
@@ -2036,7 +2036,7 @@
           <p:cNvPr id="6" name="text">
             <a:extLst xmlns:a="http://schemas.openxmlformats.org/drawingml/2006/main">
               <a:ext uri="{FF2B5EF4-FFF2-40B4-BE49-F238E27FC236}">
-                <a16:creationId xmlns:a16="http://schemas.microsoft.com/office/drawing/2014/main" id="{EA4FF1E6-11FA-49D9-B545-F9BDDB60DB6C}"/>
+                <a16:creationId xmlns:a16="http://schemas.microsoft.com/office/drawing/2014/main" id="{50A8D1F9-8A96-422E-9F31-1CDC9A55E285}"/>
               </a:ext>
             </a:extLst>
           </p:cNvPr>
@@ -2081,7 +2081,7 @@
           <p:cNvPr id="7" name="text">
             <a:extLst xmlns:a="http://schemas.openxmlformats.org/drawingml/2006/main">
               <a:ext uri="{FF2B5EF4-FFF2-40B4-BE49-F238E27FC236}">
-                <a16:creationId xmlns:a16="http://schemas.microsoft.com/office/drawing/2014/main" id="{4C618C9E-7D89-44D6-9450-312FE6A0FB31}"/>
+                <a16:creationId xmlns:a16="http://schemas.microsoft.com/office/drawing/2014/main" id="{8AEE2533-AC5C-47A7-BAA4-92A81A9DD80A}"/>
               </a:ext>
             </a:extLst>
           </p:cNvPr>
@@ -2126,7 +2126,7 @@
           <p:cNvPr id="8" name="text">
             <a:extLst xmlns:a="http://schemas.openxmlformats.org/drawingml/2006/main">
               <a:ext uri="{FF2B5EF4-FFF2-40B4-BE49-F238E27FC236}">
-                <a16:creationId xmlns:a16="http://schemas.microsoft.com/office/drawing/2014/main" id="{D4454965-3598-46AA-8FCB-C48EA109A11E}"/>
+                <a16:creationId xmlns:a16="http://schemas.microsoft.com/office/drawing/2014/main" id="{E81D446B-4E1F-4194-ABDD-8AD704FE9832}"/>
               </a:ext>
             </a:extLst>
           </p:cNvPr>
@@ -2171,7 +2171,7 @@
           <p:cNvPr id="9" name="text">
             <a:extLst xmlns:a="http://schemas.openxmlformats.org/drawingml/2006/main">
               <a:ext uri="{FF2B5EF4-FFF2-40B4-BE49-F238E27FC236}">
-                <a16:creationId xmlns:a16="http://schemas.microsoft.com/office/drawing/2014/main" id="{7C0ECD91-2798-4790-9728-0EE038357364}"/>
+                <a16:creationId xmlns:a16="http://schemas.microsoft.com/office/drawing/2014/main" id="{594AE834-0A7A-4419-ABA8-AAC10C9010F0}"/>
               </a:ext>
             </a:extLst>
           </p:cNvPr>
@@ -2216,7 +2216,7 @@
           <p:cNvPr id="10" name="text">
             <a:extLst xmlns:a="http://schemas.openxmlformats.org/drawingml/2006/main">
               <a:ext uri="{FF2B5EF4-FFF2-40B4-BE49-F238E27FC236}">
-                <a16:creationId xmlns:a16="http://schemas.microsoft.com/office/drawing/2014/main" id="{A4BED509-69D4-4D39-A2E9-0053322BEC9A}"/>
+                <a16:creationId xmlns:a16="http://schemas.microsoft.com/office/drawing/2014/main" id="{207D5D22-7A31-49D5-85E6-4E37E58067A5}"/>
               </a:ext>
             </a:extLst>
           </p:cNvPr>
@@ -2261,7 +2261,7 @@
           <p:cNvPr id="11" name="text">
             <a:extLst xmlns:a="http://schemas.openxmlformats.org/drawingml/2006/main">
               <a:ext uri="{FF2B5EF4-FFF2-40B4-BE49-F238E27FC236}">
-                <a16:creationId xmlns:a16="http://schemas.microsoft.com/office/drawing/2014/main" id="{C8B4371E-148A-4ECB-AACC-4F698CEBD103}"/>
+                <a16:creationId xmlns:a16="http://schemas.microsoft.com/office/drawing/2014/main" id="{2D5AAED9-9B19-448D-A50A-7BE030AE88AC}"/>
               </a:ext>
             </a:extLst>
           </p:cNvPr>
@@ -2306,7 +2306,7 @@
           <p:cNvPr id="12" name="text">
             <a:extLst xmlns:a="http://schemas.openxmlformats.org/drawingml/2006/main">
               <a:ext uri="{FF2B5EF4-FFF2-40B4-BE49-F238E27FC236}">
-                <a16:creationId xmlns:a16="http://schemas.microsoft.com/office/drawing/2014/main" id="{3084FA8B-660E-4C3B-9477-B77EA8CB61ED}"/>
+                <a16:creationId xmlns:a16="http://schemas.microsoft.com/office/drawing/2014/main" id="{97969ADA-079D-44A3-AC21-FE3E0F028A4C}"/>
               </a:ext>
             </a:extLst>
           </p:cNvPr>
@@ -2351,7 +2351,7 @@
           <p:cNvPr id="13" name="text">
             <a:extLst xmlns:a="http://schemas.openxmlformats.org/drawingml/2006/main">
               <a:ext uri="{FF2B5EF4-FFF2-40B4-BE49-F238E27FC236}">
-                <a16:creationId xmlns:a16="http://schemas.microsoft.com/office/drawing/2014/main" id="{07C07D89-DB07-4839-973C-05A2B0AD81D0}"/>
+                <a16:creationId xmlns:a16="http://schemas.microsoft.com/office/drawing/2014/main" id="{66D2EDEF-735F-4C4F-B8DD-E1ACCC6348AD}"/>
               </a:ext>
             </a:extLst>
           </p:cNvPr>
@@ -2396,7 +2396,7 @@
           <p:cNvPr id="14" name="text">
             <a:extLst xmlns:a="http://schemas.openxmlformats.org/drawingml/2006/main">
               <a:ext uri="{FF2B5EF4-FFF2-40B4-BE49-F238E27FC236}">
-                <a16:creationId xmlns:a16="http://schemas.microsoft.com/office/drawing/2014/main" id="{410407B0-EDAC-4CBA-8633-288C3FFBC88C}"/>
+                <a16:creationId xmlns:a16="http://schemas.microsoft.com/office/drawing/2014/main" id="{9E2A63C7-2523-47C0-9FA7-0900140413AF}"/>
               </a:ext>
             </a:extLst>
           </p:cNvPr>
@@ -2441,7 +2441,7 @@
           <p:cNvPr id="15" name="text">
             <a:extLst xmlns:a="http://schemas.openxmlformats.org/drawingml/2006/main">
               <a:ext uri="{FF2B5EF4-FFF2-40B4-BE49-F238E27FC236}">
-                <a16:creationId xmlns:a16="http://schemas.microsoft.com/office/drawing/2014/main" id="{19A25FA4-9B64-4D52-8376-66CA8A86A23F}"/>
+                <a16:creationId xmlns:a16="http://schemas.microsoft.com/office/drawing/2014/main" id="{5D892137-4CBA-401B-ACBF-99DAB421BA5D}"/>
               </a:ext>
             </a:extLst>
           </p:cNvPr>
@@ -2486,7 +2486,7 @@
           <p:cNvPr id="16" name="text">
             <a:extLst xmlns:a="http://schemas.openxmlformats.org/drawingml/2006/main">
               <a:ext uri="{FF2B5EF4-FFF2-40B4-BE49-F238E27FC236}">
-                <a16:creationId xmlns:a16="http://schemas.microsoft.com/office/drawing/2014/main" id="{9C2D8236-583A-4D90-9901-403C9FF7FDE0}"/>
+                <a16:creationId xmlns:a16="http://schemas.microsoft.com/office/drawing/2014/main" id="{F9272654-8A48-4337-B7B5-9ABAD4EEDEA5}"/>
               </a:ext>
             </a:extLst>
           </p:cNvPr>
@@ -2531,7 +2531,7 @@
           <p:cNvPr id="17" name="text">
             <a:extLst xmlns:a="http://schemas.openxmlformats.org/drawingml/2006/main">
               <a:ext uri="{FF2B5EF4-FFF2-40B4-BE49-F238E27FC236}">
-                <a16:creationId xmlns:a16="http://schemas.microsoft.com/office/drawing/2014/main" id="{C2466DDD-2AD0-4896-9DEB-F04E049C245C}"/>
+                <a16:creationId xmlns:a16="http://schemas.microsoft.com/office/drawing/2014/main" id="{8B874D13-E0D0-4F8C-AB33-044DF6165021}"/>
               </a:ext>
             </a:extLst>
           </p:cNvPr>
@@ -2576,7 +2576,7 @@
           <p:cNvPr id="18" name="text">
             <a:extLst xmlns:a="http://schemas.openxmlformats.org/drawingml/2006/main">
               <a:ext uri="{FF2B5EF4-FFF2-40B4-BE49-F238E27FC236}">
-                <a16:creationId xmlns:a16="http://schemas.microsoft.com/office/drawing/2014/main" id="{410971FD-9924-49D1-B7F0-7E23A62487D2}"/>
+                <a16:creationId xmlns:a16="http://schemas.microsoft.com/office/drawing/2014/main" id="{E8CBBA37-3DE6-4100-BB49-4E424A809403}"/>
               </a:ext>
             </a:extLst>
           </p:cNvPr>
@@ -2621,7 +2621,7 @@
           <p:cNvPr id="19" name="text">
             <a:extLst xmlns:a="http://schemas.openxmlformats.org/drawingml/2006/main">
               <a:ext uri="{FF2B5EF4-FFF2-40B4-BE49-F238E27FC236}">
-                <a16:creationId xmlns:a16="http://schemas.microsoft.com/office/drawing/2014/main" id="{9AB728F7-7EFF-4822-AB85-A48C45078F4C}"/>
+                <a16:creationId xmlns:a16="http://schemas.microsoft.com/office/drawing/2014/main" id="{E98A0F60-1295-4886-B205-F4E4E58DEC10}"/>
               </a:ext>
             </a:extLst>
           </p:cNvPr>
@@ -2666,7 +2666,7 @@
           <p:cNvPr id="20" name="text">
             <a:extLst xmlns:a="http://schemas.openxmlformats.org/drawingml/2006/main">
               <a:ext uri="{FF2B5EF4-FFF2-40B4-BE49-F238E27FC236}">
-                <a16:creationId xmlns:a16="http://schemas.microsoft.com/office/drawing/2014/main" id="{C315ADD9-8EDC-41FE-B5EE-D776F74205EA}"/>
+                <a16:creationId xmlns:a16="http://schemas.microsoft.com/office/drawing/2014/main" id="{073ED5B0-27F8-4368-B8D1-1CDFCD8A31E1}"/>
               </a:ext>
             </a:extLst>
           </p:cNvPr>
@@ -2711,7 +2711,7 @@
           <p:cNvPr id="21" name="text">
             <a:extLst xmlns:a="http://schemas.openxmlformats.org/drawingml/2006/main">
               <a:ext uri="{FF2B5EF4-FFF2-40B4-BE49-F238E27FC236}">
-                <a16:creationId xmlns:a16="http://schemas.microsoft.com/office/drawing/2014/main" id="{774808B7-8B2D-48D4-BCBB-1994E8D298B9}"/>
+                <a16:creationId xmlns:a16="http://schemas.microsoft.com/office/drawing/2014/main" id="{F963AD2E-4B28-4D32-8F82-344AEAE3C914}"/>
               </a:ext>
             </a:extLst>
           </p:cNvPr>
@@ -2756,7 +2756,7 @@
           <p:cNvPr id="22" name="text">
             <a:extLst xmlns:a="http://schemas.openxmlformats.org/drawingml/2006/main">
               <a:ext uri="{FF2B5EF4-FFF2-40B4-BE49-F238E27FC236}">
-                <a16:creationId xmlns:a16="http://schemas.microsoft.com/office/drawing/2014/main" id="{73063D5B-647C-4797-AD29-27C6BF4E70FE}"/>
+                <a16:creationId xmlns:a16="http://schemas.microsoft.com/office/drawing/2014/main" id="{735C9656-F481-40DB-9784-4BAB38F68B88}"/>
               </a:ext>
             </a:extLst>
           </p:cNvPr>
@@ -2801,7 +2801,7 @@
           <p:cNvPr id="23" name="footer">
             <a:extLst xmlns:a="http://schemas.openxmlformats.org/drawingml/2006/main">
               <a:ext uri="{FF2B5EF4-FFF2-40B4-BE49-F238E27FC236}">
-                <a16:creationId xmlns:a16="http://schemas.microsoft.com/office/drawing/2014/main" id="{3AFEB0A4-B28C-4F42-89A2-37346105A618}"/>
+                <a16:creationId xmlns:a16="http://schemas.microsoft.com/office/drawing/2014/main" id="{DBBC9828-C86A-4478-9298-C8E76493B4D8}"/>
               </a:ext>
             </a:extLst>
           </p:cNvPr>
@@ -2844,7 +2844,7 @@
     </p:spTree>
     <p:extLst>
       <p:ext uri="{BB962C8B-B14F-4D97-AF65-F5344CB8AC3E}">
-        <p14:creationId xmlns:p14="http://schemas.microsoft.com/office/powerpoint/2010/main" val="2098661438"/>
+        <p14:creationId xmlns:p14="http://schemas.microsoft.com/office/powerpoint/2010/main" val="437637832"/>
       </p:ext>
     </p:extLst>
   </p:cSld>
@@ -2868,7 +2868,7 @@
           <p:cNvPr id="1" name="text">
             <a:extLst xmlns:a="http://schemas.openxmlformats.org/drawingml/2006/main">
               <a:ext uri="{FF2B5EF4-FFF2-40B4-BE49-F238E27FC236}">
-                <a16:creationId xmlns:a16="http://schemas.microsoft.com/office/drawing/2014/main" id="{EFBD8D0F-01B7-48D6-9070-C2005C55525C}"/>
+                <a16:creationId xmlns:a16="http://schemas.microsoft.com/office/drawing/2014/main" id="{FBDC2850-500B-4323-970A-7ED938FF4B1F}"/>
               </a:ext>
             </a:extLst>
           </p:cNvPr>
@@ -2917,10 +2917,10 @@
           <p:nvPr/>
         </p:nvPicPr>
         <p:blipFill>
-          <a:blip xmlns:r="http://schemas.openxmlformats.org/officeDocument/2006/relationships" xmlns:a="http://schemas.openxmlformats.org/drawingml/2006/main" r:embed="Reca3e3bbb1094659">
+          <a:blip xmlns:r="http://schemas.openxmlformats.org/officeDocument/2006/relationships" xmlns:a="http://schemas.openxmlformats.org/drawingml/2006/main" r:embed="R24dfbb655b494f8c">
             <a:extLst>
               <a:ext uri="{96DAC541-7B7A-43D3-8B79-37D633B846F1}">
-                <asvg:svgBlip xmlns:asvg="http://schemas.microsoft.com/office/drawing/2016/SVG/main" r:embed="R38df1cf5c50047d9"/>
+                <asvg:svgBlip xmlns:asvg="http://schemas.microsoft.com/office/drawing/2016/SVG/main" r:embed="R47a9da69cb8a4a71"/>
               </a:ext>
             </a:extLst>
           </a:blip>
@@ -2939,7 +2939,7 @@
     </p:spTree>
     <p:extLst>
       <p:ext uri="{BB962C8B-B14F-4D97-AF65-F5344CB8AC3E}">
-        <p14:creationId xmlns:p14="http://schemas.microsoft.com/office/powerpoint/2010/main" val="656472993"/>
+        <p14:creationId xmlns:p14="http://schemas.microsoft.com/office/powerpoint/2010/main" val="1937214717"/>
       </p:ext>
     </p:extLst>
   </p:cSld>
@@ -2963,7 +2963,7 @@
           <p:cNvPr id="1" name="slide-title">
             <a:extLst xmlns:a="http://schemas.openxmlformats.org/drawingml/2006/main">
               <a:ext uri="{FF2B5EF4-FFF2-40B4-BE49-F238E27FC236}">
-                <a16:creationId xmlns:a16="http://schemas.microsoft.com/office/drawing/2014/main" id="{6584142D-106F-4B60-B16F-FC8D29C71810}"/>
+                <a16:creationId xmlns:a16="http://schemas.microsoft.com/office/drawing/2014/main" id="{81A79E0F-68D1-41FD-BEB6-53993296A8F1}"/>
               </a:ext>
             </a:extLst>
           </p:cNvPr>
@@ -3008,7 +3008,7 @@
           <p:cNvPr id="2" name="">
             <a:extLst xmlns:a="http://schemas.openxmlformats.org/drawingml/2006/main">
               <a:ext uri="{FF2B5EF4-FFF2-40B4-BE49-F238E27FC236}">
-                <a16:creationId xmlns:a16="http://schemas.microsoft.com/office/drawing/2014/main" id="{75F33B8B-3751-4550-B7F9-6C235B6F3835}"/>
+                <a16:creationId xmlns:a16="http://schemas.microsoft.com/office/drawing/2014/main" id="{DB33041C-4246-4479-B4D9-6FB8C7E338C9}"/>
               </a:ext>
             </a:extLst>
           </p:cNvPr>
@@ -3041,7 +3041,7 @@
           <p:cNvPr id="3" name="text">
             <a:extLst xmlns:a="http://schemas.openxmlformats.org/drawingml/2006/main">
               <a:ext uri="{FF2B5EF4-FFF2-40B4-BE49-F238E27FC236}">
-                <a16:creationId xmlns:a16="http://schemas.microsoft.com/office/drawing/2014/main" id="{8082B3AE-7C08-42D7-BA9E-CAC6BF64AC02}"/>
+                <a16:creationId xmlns:a16="http://schemas.microsoft.com/office/drawing/2014/main" id="{B8A761BF-C0D1-4581-9C01-71B9CEBE2A81}"/>
               </a:ext>
             </a:extLst>
           </p:cNvPr>
@@ -3086,7 +3086,7 @@
           <p:cNvPr id="4" name="text">
             <a:extLst xmlns:a="http://schemas.openxmlformats.org/drawingml/2006/main">
               <a:ext uri="{FF2B5EF4-FFF2-40B4-BE49-F238E27FC236}">
-                <a16:creationId xmlns:a16="http://schemas.microsoft.com/office/drawing/2014/main" id="{DEC898DD-FE55-43D0-ABC6-EEE8C0AACC00}"/>
+                <a16:creationId xmlns:a16="http://schemas.microsoft.com/office/drawing/2014/main" id="{28BED0E7-088B-4EAB-B056-5ECD994E4530}"/>
               </a:ext>
             </a:extLst>
           </p:cNvPr>
@@ -3131,7 +3131,7 @@
           <p:cNvPr id="5" name="text">
             <a:extLst xmlns:a="http://schemas.openxmlformats.org/drawingml/2006/main">
               <a:ext uri="{FF2B5EF4-FFF2-40B4-BE49-F238E27FC236}">
-                <a16:creationId xmlns:a16="http://schemas.microsoft.com/office/drawing/2014/main" id="{5DB818A9-4E52-40E7-A050-34DBD6AC33AF}"/>
+                <a16:creationId xmlns:a16="http://schemas.microsoft.com/office/drawing/2014/main" id="{173C2A44-1C50-45EE-835E-B580E13E251E}"/>
               </a:ext>
             </a:extLst>
           </p:cNvPr>
@@ -3176,7 +3176,7 @@
           <p:cNvPr id="6" name="">
             <a:extLst xmlns:a="http://schemas.openxmlformats.org/drawingml/2006/main">
               <a:ext uri="{FF2B5EF4-FFF2-40B4-BE49-F238E27FC236}">
-                <a16:creationId xmlns:a16="http://schemas.microsoft.com/office/drawing/2014/main" id="{05C50655-EA95-4BC6-806B-E94CD80C3FE1}"/>
+                <a16:creationId xmlns:a16="http://schemas.microsoft.com/office/drawing/2014/main" id="{8CB6C9BB-E745-43E1-9DC5-1416931EBE0B}"/>
               </a:ext>
             </a:extLst>
           </p:cNvPr>
@@ -3209,7 +3209,7 @@
           <p:cNvPr id="7" name="text">
             <a:extLst xmlns:a="http://schemas.openxmlformats.org/drawingml/2006/main">
               <a:ext uri="{FF2B5EF4-FFF2-40B4-BE49-F238E27FC236}">
-                <a16:creationId xmlns:a16="http://schemas.microsoft.com/office/drawing/2014/main" id="{D7D8986E-F7F0-4C88-BD97-FA760071B805}"/>
+                <a16:creationId xmlns:a16="http://schemas.microsoft.com/office/drawing/2014/main" id="{5E6107E7-5DB9-4200-8319-B6090B523DEE}"/>
               </a:ext>
             </a:extLst>
           </p:cNvPr>
@@ -3254,7 +3254,7 @@
           <p:cNvPr id="8" name="text">
             <a:extLst xmlns:a="http://schemas.openxmlformats.org/drawingml/2006/main">
               <a:ext uri="{FF2B5EF4-FFF2-40B4-BE49-F238E27FC236}">
-                <a16:creationId xmlns:a16="http://schemas.microsoft.com/office/drawing/2014/main" id="{577A1412-9338-42AF-BFB6-F702024F7719}"/>
+                <a16:creationId xmlns:a16="http://schemas.microsoft.com/office/drawing/2014/main" id="{FE81A411-6140-4EEF-8D6E-4A4AA11F56E7}"/>
               </a:ext>
             </a:extLst>
           </p:cNvPr>
@@ -3299,7 +3299,7 @@
           <p:cNvPr id="9" name="text">
             <a:extLst xmlns:a="http://schemas.openxmlformats.org/drawingml/2006/main">
               <a:ext uri="{FF2B5EF4-FFF2-40B4-BE49-F238E27FC236}">
-                <a16:creationId xmlns:a16="http://schemas.microsoft.com/office/drawing/2014/main" id="{4D8B6DAA-DD68-4CC6-B489-2BB56D725509}"/>
+                <a16:creationId xmlns:a16="http://schemas.microsoft.com/office/drawing/2014/main" id="{A975539C-E062-4862-9172-65D8A821AC65}"/>
               </a:ext>
             </a:extLst>
           </p:cNvPr>
@@ -3344,7 +3344,7 @@
           <p:cNvPr id="10" name="">
             <a:extLst xmlns:a="http://schemas.openxmlformats.org/drawingml/2006/main">
               <a:ext uri="{FF2B5EF4-FFF2-40B4-BE49-F238E27FC236}">
-                <a16:creationId xmlns:a16="http://schemas.microsoft.com/office/drawing/2014/main" id="{184BAE05-162B-4ACD-AAEE-8DAA2B696D82}"/>
+                <a16:creationId xmlns:a16="http://schemas.microsoft.com/office/drawing/2014/main" id="{1B69A1ED-4FB9-4ABB-8DD8-73BD1778A8A7}"/>
               </a:ext>
             </a:extLst>
           </p:cNvPr>
@@ -3377,7 +3377,7 @@
           <p:cNvPr id="11" name="text">
             <a:extLst xmlns:a="http://schemas.openxmlformats.org/drawingml/2006/main">
               <a:ext uri="{FF2B5EF4-FFF2-40B4-BE49-F238E27FC236}">
-                <a16:creationId xmlns:a16="http://schemas.microsoft.com/office/drawing/2014/main" id="{E362EA37-2CD0-4992-9C04-A0828034E199}"/>
+                <a16:creationId xmlns:a16="http://schemas.microsoft.com/office/drawing/2014/main" id="{FDE9BBBC-01C8-42CF-8091-E8440D4691B0}"/>
               </a:ext>
             </a:extLst>
           </p:cNvPr>
@@ -3422,7 +3422,7 @@
           <p:cNvPr id="12" name="text">
             <a:extLst xmlns:a="http://schemas.openxmlformats.org/drawingml/2006/main">
               <a:ext uri="{FF2B5EF4-FFF2-40B4-BE49-F238E27FC236}">
-                <a16:creationId xmlns:a16="http://schemas.microsoft.com/office/drawing/2014/main" id="{6489EF80-4197-489A-BE8B-58F70CCC6862}"/>
+                <a16:creationId xmlns:a16="http://schemas.microsoft.com/office/drawing/2014/main" id="{D8EF864D-F830-48BA-9D1E-EE4E28D9A35A}"/>
               </a:ext>
             </a:extLst>
           </p:cNvPr>
@@ -3467,7 +3467,7 @@
           <p:cNvPr id="13" name="text">
             <a:extLst xmlns:a="http://schemas.openxmlformats.org/drawingml/2006/main">
               <a:ext uri="{FF2B5EF4-FFF2-40B4-BE49-F238E27FC236}">
-                <a16:creationId xmlns:a16="http://schemas.microsoft.com/office/drawing/2014/main" id="{D6F70871-5327-4BBC-B2E0-D1EAD3313A5F}"/>
+                <a16:creationId xmlns:a16="http://schemas.microsoft.com/office/drawing/2014/main" id="{20213755-C129-4808-8559-0F223EC3EC86}"/>
               </a:ext>
             </a:extLst>
           </p:cNvPr>
@@ -3512,7 +3512,7 @@
           <p:cNvPr id="14" name="">
             <a:extLst xmlns:a="http://schemas.openxmlformats.org/drawingml/2006/main">
               <a:ext uri="{FF2B5EF4-FFF2-40B4-BE49-F238E27FC236}">
-                <a16:creationId xmlns:a16="http://schemas.microsoft.com/office/drawing/2014/main" id="{3475612E-DC64-452D-86CE-9F80AD33357C}"/>
+                <a16:creationId xmlns:a16="http://schemas.microsoft.com/office/drawing/2014/main" id="{DC6E9779-5EE4-4508-BFAA-54FAEB144294}"/>
               </a:ext>
             </a:extLst>
           </p:cNvPr>
@@ -3545,7 +3545,7 @@
           <p:cNvPr id="15" name="text">
             <a:extLst xmlns:a="http://schemas.openxmlformats.org/drawingml/2006/main">
               <a:ext uri="{FF2B5EF4-FFF2-40B4-BE49-F238E27FC236}">
-                <a16:creationId xmlns:a16="http://schemas.microsoft.com/office/drawing/2014/main" id="{1015DF21-FD73-46EE-97FD-F6B554DBCA04}"/>
+                <a16:creationId xmlns:a16="http://schemas.microsoft.com/office/drawing/2014/main" id="{4C56F03C-05CE-43E0-8A46-AAD3ED054F27}"/>
               </a:ext>
             </a:extLst>
           </p:cNvPr>
@@ -3590,7 +3590,7 @@
           <p:cNvPr id="16" name="text">
             <a:extLst xmlns:a="http://schemas.openxmlformats.org/drawingml/2006/main">
               <a:ext uri="{FF2B5EF4-FFF2-40B4-BE49-F238E27FC236}">
-                <a16:creationId xmlns:a16="http://schemas.microsoft.com/office/drawing/2014/main" id="{04CE7B8A-69DA-4238-8AA3-B3B3559C749D}"/>
+                <a16:creationId xmlns:a16="http://schemas.microsoft.com/office/drawing/2014/main" id="{371A0C28-42CD-4FBF-A00C-F0DF164796C6}"/>
               </a:ext>
             </a:extLst>
           </p:cNvPr>
@@ -3635,7 +3635,7 @@
           <p:cNvPr id="17" name="text">
             <a:extLst xmlns:a="http://schemas.openxmlformats.org/drawingml/2006/main">
               <a:ext uri="{FF2B5EF4-FFF2-40B4-BE49-F238E27FC236}">
-                <a16:creationId xmlns:a16="http://schemas.microsoft.com/office/drawing/2014/main" id="{8F9F7BB8-A85C-4197-A67C-0F594F95DB74}"/>
+                <a16:creationId xmlns:a16="http://schemas.microsoft.com/office/drawing/2014/main" id="{2F5DB315-1389-4DCF-829D-D569D209421F}"/>
               </a:ext>
             </a:extLst>
           </p:cNvPr>
@@ -3680,7 +3680,7 @@
           <p:cNvPr id="18" name="">
             <a:extLst xmlns:a="http://schemas.openxmlformats.org/drawingml/2006/main">
               <a:ext uri="{FF2B5EF4-FFF2-40B4-BE49-F238E27FC236}">
-                <a16:creationId xmlns:a16="http://schemas.microsoft.com/office/drawing/2014/main" id="{49FAFBC3-A3A0-42C1-8257-86B7F5457098}"/>
+                <a16:creationId xmlns:a16="http://schemas.microsoft.com/office/drawing/2014/main" id="{50E028D0-1C0A-4834-9B71-224CA5BF613C}"/>
               </a:ext>
             </a:extLst>
           </p:cNvPr>
@@ -3713,7 +3713,7 @@
           <p:cNvPr id="19" name="text">
             <a:extLst xmlns:a="http://schemas.openxmlformats.org/drawingml/2006/main">
               <a:ext uri="{FF2B5EF4-FFF2-40B4-BE49-F238E27FC236}">
-                <a16:creationId xmlns:a16="http://schemas.microsoft.com/office/drawing/2014/main" id="{13F733CD-2858-4960-B64A-B6ADAE023484}"/>
+                <a16:creationId xmlns:a16="http://schemas.microsoft.com/office/drawing/2014/main" id="{E92AE920-38F8-494C-A21D-E4F70EB11CBE}"/>
               </a:ext>
             </a:extLst>
           </p:cNvPr>
@@ -3758,7 +3758,7 @@
           <p:cNvPr id="20" name="text">
             <a:extLst xmlns:a="http://schemas.openxmlformats.org/drawingml/2006/main">
               <a:ext uri="{FF2B5EF4-FFF2-40B4-BE49-F238E27FC236}">
-                <a16:creationId xmlns:a16="http://schemas.microsoft.com/office/drawing/2014/main" id="{0F4A3325-6080-45A2-848D-03123EB309A2}"/>
+                <a16:creationId xmlns:a16="http://schemas.microsoft.com/office/drawing/2014/main" id="{07873500-F95B-4BAB-8C61-3E86FE4BF1E1}"/>
               </a:ext>
             </a:extLst>
           </p:cNvPr>
@@ -3803,7 +3803,7 @@
           <p:cNvPr id="21" name="text">
             <a:extLst xmlns:a="http://schemas.openxmlformats.org/drawingml/2006/main">
               <a:ext uri="{FF2B5EF4-FFF2-40B4-BE49-F238E27FC236}">
-                <a16:creationId xmlns:a16="http://schemas.microsoft.com/office/drawing/2014/main" id="{B86D3EC5-9598-4116-BD7A-423C3FE2577D}"/>
+                <a16:creationId xmlns:a16="http://schemas.microsoft.com/office/drawing/2014/main" id="{D7475F5E-52A7-4255-A4D1-C9A041F8C275}"/>
               </a:ext>
             </a:extLst>
           </p:cNvPr>
@@ -3848,7 +3848,7 @@
           <p:cNvPr id="22" name="">
             <a:extLst xmlns:a="http://schemas.openxmlformats.org/drawingml/2006/main">
               <a:ext uri="{FF2B5EF4-FFF2-40B4-BE49-F238E27FC236}">
-                <a16:creationId xmlns:a16="http://schemas.microsoft.com/office/drawing/2014/main" id="{908E9F94-E3CA-424F-9E3C-6769F07A8621}"/>
+                <a16:creationId xmlns:a16="http://schemas.microsoft.com/office/drawing/2014/main" id="{8C9F19E4-B8EC-4E03-8FAF-4E9E6BCF9D46}"/>
               </a:ext>
             </a:extLst>
           </p:cNvPr>
@@ -3881,7 +3881,7 @@
           <p:cNvPr id="23" name="text">
             <a:extLst xmlns:a="http://schemas.openxmlformats.org/drawingml/2006/main">
               <a:ext uri="{FF2B5EF4-FFF2-40B4-BE49-F238E27FC236}">
-                <a16:creationId xmlns:a16="http://schemas.microsoft.com/office/drawing/2014/main" id="{A4B1146B-789E-4DC1-9154-51AE50CFDFA2}"/>
+                <a16:creationId xmlns:a16="http://schemas.microsoft.com/office/drawing/2014/main" id="{8EE830E7-F183-4964-980E-BBC851BBE600}"/>
               </a:ext>
             </a:extLst>
           </p:cNvPr>
@@ -3926,7 +3926,7 @@
           <p:cNvPr id="24" name="text">
             <a:extLst xmlns:a="http://schemas.openxmlformats.org/drawingml/2006/main">
               <a:ext uri="{FF2B5EF4-FFF2-40B4-BE49-F238E27FC236}">
-                <a16:creationId xmlns:a16="http://schemas.microsoft.com/office/drawing/2014/main" id="{F8DC969C-5773-4628-82AD-AF50E9BF7060}"/>
+                <a16:creationId xmlns:a16="http://schemas.microsoft.com/office/drawing/2014/main" id="{BBE9AE75-FBFC-4D7F-956F-225DAE829263}"/>
               </a:ext>
             </a:extLst>
           </p:cNvPr>
@@ -3971,7 +3971,7 @@
           <p:cNvPr id="25" name="text">
             <a:extLst xmlns:a="http://schemas.openxmlformats.org/drawingml/2006/main">
               <a:ext uri="{FF2B5EF4-FFF2-40B4-BE49-F238E27FC236}">
-                <a16:creationId xmlns:a16="http://schemas.microsoft.com/office/drawing/2014/main" id="{99F952DA-66C8-4787-B1CC-26A3C6CC1EF8}"/>
+                <a16:creationId xmlns:a16="http://schemas.microsoft.com/office/drawing/2014/main" id="{BEE2C41F-8CFD-4A47-B47C-F63774FFE158}"/>
               </a:ext>
             </a:extLst>
           </p:cNvPr>
@@ -4016,7 +4016,7 @@
           <p:cNvPr id="26" name="">
             <a:extLst xmlns:a="http://schemas.openxmlformats.org/drawingml/2006/main">
               <a:ext uri="{FF2B5EF4-FFF2-40B4-BE49-F238E27FC236}">
-                <a16:creationId xmlns:a16="http://schemas.microsoft.com/office/drawing/2014/main" id="{F590A320-A04E-453E-93F1-11B722D1D817}"/>
+                <a16:creationId xmlns:a16="http://schemas.microsoft.com/office/drawing/2014/main" id="{56E638A7-5DC0-4298-ACD6-3C92AE88B42D}"/>
               </a:ext>
             </a:extLst>
           </p:cNvPr>
@@ -4049,7 +4049,7 @@
           <p:cNvPr id="27" name="text">
             <a:extLst xmlns:a="http://schemas.openxmlformats.org/drawingml/2006/main">
               <a:ext uri="{FF2B5EF4-FFF2-40B4-BE49-F238E27FC236}">
-                <a16:creationId xmlns:a16="http://schemas.microsoft.com/office/drawing/2014/main" id="{3AB37E6C-F2E8-48FC-9032-80B141F7A682}"/>
+                <a16:creationId xmlns:a16="http://schemas.microsoft.com/office/drawing/2014/main" id="{C188A00B-6EC9-444C-B33A-6A532FAC1D66}"/>
               </a:ext>
             </a:extLst>
           </p:cNvPr>
@@ -4094,7 +4094,7 @@
           <p:cNvPr id="28" name="text">
             <a:extLst xmlns:a="http://schemas.openxmlformats.org/drawingml/2006/main">
               <a:ext uri="{FF2B5EF4-FFF2-40B4-BE49-F238E27FC236}">
-                <a16:creationId xmlns:a16="http://schemas.microsoft.com/office/drawing/2014/main" id="{BB1A05F1-B1F6-422D-84C7-76E1B1D26DC0}"/>
+                <a16:creationId xmlns:a16="http://schemas.microsoft.com/office/drawing/2014/main" id="{3B3DB17D-89C8-4DA6-96DC-1626A7165332}"/>
               </a:ext>
             </a:extLst>
           </p:cNvPr>
@@ -4139,7 +4139,7 @@
           <p:cNvPr id="29" name="text">
             <a:extLst xmlns:a="http://schemas.openxmlformats.org/drawingml/2006/main">
               <a:ext uri="{FF2B5EF4-FFF2-40B4-BE49-F238E27FC236}">
-                <a16:creationId xmlns:a16="http://schemas.microsoft.com/office/drawing/2014/main" id="{40DE8496-3BC6-443E-BAB4-A90E57A5D7E7}"/>
+                <a16:creationId xmlns:a16="http://schemas.microsoft.com/office/drawing/2014/main" id="{FE6B802F-4222-435A-A2CB-DDC83E5140BA}"/>
               </a:ext>
             </a:extLst>
           </p:cNvPr>
@@ -4184,7 +4184,7 @@
           <p:cNvPr id="30" name="">
             <a:extLst xmlns:a="http://schemas.openxmlformats.org/drawingml/2006/main">
               <a:ext uri="{FF2B5EF4-FFF2-40B4-BE49-F238E27FC236}">
-                <a16:creationId xmlns:a16="http://schemas.microsoft.com/office/drawing/2014/main" id="{3C0A49F8-10E1-4848-A75E-D2436131075B}"/>
+                <a16:creationId xmlns:a16="http://schemas.microsoft.com/office/drawing/2014/main" id="{DB8D62FF-2048-4388-B62D-EF3D2DF31F8A}"/>
               </a:ext>
             </a:extLst>
           </p:cNvPr>
@@ -4221,10 +4221,10 @@
           <p:nvPr/>
         </p:nvPicPr>
         <p:blipFill>
-          <a:blip xmlns:r="http://schemas.openxmlformats.org/officeDocument/2006/relationships" xmlns:a="http://schemas.openxmlformats.org/drawingml/2006/main" r:embed="R120a72f0efe74426">
+          <a:blip xmlns:r="http://schemas.openxmlformats.org/officeDocument/2006/relationships" xmlns:a="http://schemas.openxmlformats.org/drawingml/2006/main" r:embed="R73c06ea713384540">
             <a:extLst>
               <a:ext uri="{96DAC541-7B7A-43D3-8B79-37D633B846F1}">
-                <asvg:svgBlip xmlns:asvg="http://schemas.microsoft.com/office/drawing/2016/SVG/main" r:embed="Re64ef39e1531495a"/>
+                <asvg:svgBlip xmlns:asvg="http://schemas.microsoft.com/office/drawing/2016/SVG/main" r:embed="R6646a5556c9142e9"/>
               </a:ext>
             </a:extLst>
           </a:blip>
@@ -4245,7 +4245,7 @@
           <p:cNvPr id="32" name="footer">
             <a:extLst xmlns:a="http://schemas.openxmlformats.org/drawingml/2006/main">
               <a:ext uri="{FF2B5EF4-FFF2-40B4-BE49-F238E27FC236}">
-                <a16:creationId xmlns:a16="http://schemas.microsoft.com/office/drawing/2014/main" id="{9A9417D4-9ACF-4DB9-B319-B17BCA56710A}"/>
+                <a16:creationId xmlns:a16="http://schemas.microsoft.com/office/drawing/2014/main" id="{56CFB8DB-A433-4C7F-9E7A-53C5757CEDAD}"/>
               </a:ext>
             </a:extLst>
           </p:cNvPr>
@@ -4288,7 +4288,7 @@
     </p:spTree>
     <p:extLst>
       <p:ext uri="{BB962C8B-B14F-4D97-AF65-F5344CB8AC3E}">
-        <p14:creationId xmlns:p14="http://schemas.microsoft.com/office/powerpoint/2010/main" val="155987366"/>
+        <p14:creationId xmlns:p14="http://schemas.microsoft.com/office/powerpoint/2010/main" val="1030199719"/>
       </p:ext>
     </p:extLst>
   </p:cSld>
@@ -4312,7 +4312,7 @@
           <p:cNvPr id="1" name="slide-title">
             <a:extLst xmlns:a="http://schemas.openxmlformats.org/drawingml/2006/main">
               <a:ext uri="{FF2B5EF4-FFF2-40B4-BE49-F238E27FC236}">
-                <a16:creationId xmlns:a16="http://schemas.microsoft.com/office/drawing/2014/main" id="{3175DAEF-ACED-4D53-B2E9-EDF9C6EAA3FE}"/>
+                <a16:creationId xmlns:a16="http://schemas.microsoft.com/office/drawing/2014/main" id="{FFDA2F19-FF5C-4797-9F32-8554DC098722}"/>
               </a:ext>
             </a:extLst>
           </p:cNvPr>
@@ -4357,7 +4357,7 @@
           <p:cNvPr id="2" name="">
             <a:extLst xmlns:a="http://schemas.openxmlformats.org/drawingml/2006/main">
               <a:ext uri="{FF2B5EF4-FFF2-40B4-BE49-F238E27FC236}">
-                <a16:creationId xmlns:a16="http://schemas.microsoft.com/office/drawing/2014/main" id="{432E8FBB-8540-47EF-AA25-38B1B8E864B8}"/>
+                <a16:creationId xmlns:a16="http://schemas.microsoft.com/office/drawing/2014/main" id="{2D378976-B305-42E1-98E6-8927FCCCEF67}"/>
               </a:ext>
             </a:extLst>
           </p:cNvPr>
@@ -4394,10 +4394,10 @@
           <p:nvPr/>
         </p:nvPicPr>
         <p:blipFill>
-          <a:blip xmlns:r="http://schemas.openxmlformats.org/officeDocument/2006/relationships" xmlns:a="http://schemas.openxmlformats.org/drawingml/2006/main" r:embed="R48bca85e3a3a49ed">
+          <a:blip xmlns:r="http://schemas.openxmlformats.org/officeDocument/2006/relationships" xmlns:a="http://schemas.openxmlformats.org/drawingml/2006/main" r:embed="R346949deeb4141e0">
             <a:extLst>
               <a:ext uri="{96DAC541-7B7A-43D3-8B79-37D633B846F1}">
-                <asvg:svgBlip xmlns:asvg="http://schemas.microsoft.com/office/drawing/2016/SVG/main" r:embed="Re20863587c9b4a19"/>
+                <asvg:svgBlip xmlns:asvg="http://schemas.microsoft.com/office/drawing/2016/SVG/main" r:embed="Rb8d0ed1b9f5d47b9"/>
               </a:ext>
             </a:extLst>
           </a:blip>
@@ -4418,7 +4418,7 @@
           <p:cNvPr id="4" name="text">
             <a:extLst xmlns:a="http://schemas.openxmlformats.org/drawingml/2006/main">
               <a:ext uri="{FF2B5EF4-FFF2-40B4-BE49-F238E27FC236}">
-                <a16:creationId xmlns:a16="http://schemas.microsoft.com/office/drawing/2014/main" id="{F66857B9-7798-41BA-A582-F382B5CC001B}"/>
+                <a16:creationId xmlns:a16="http://schemas.microsoft.com/office/drawing/2014/main" id="{C2204F17-183C-4A6C-9962-2F36233800BA}"/>
               </a:ext>
             </a:extLst>
           </p:cNvPr>
@@ -4463,7 +4463,7 @@
           <p:cNvPr id="5" name="text">
             <a:extLst xmlns:a="http://schemas.openxmlformats.org/drawingml/2006/main">
               <a:ext uri="{FF2B5EF4-FFF2-40B4-BE49-F238E27FC236}">
-                <a16:creationId xmlns:a16="http://schemas.microsoft.com/office/drawing/2014/main" id="{C578CFC7-8F80-4517-A4D5-8A358060AB19}"/>
+                <a16:creationId xmlns:a16="http://schemas.microsoft.com/office/drawing/2014/main" id="{F4A070AC-D23A-4805-99AA-164764987016}"/>
               </a:ext>
             </a:extLst>
           </p:cNvPr>
@@ -4498,7 +4498,7 @@
                   <a:srgbClr val="173442"/>
                 </a:solidFill>
               </a:rPr>
-              <a:t>1,287 instructions with expected results</a:t>
+              <a:t>49,149 instructions with expected results</a:t>
             </a:r>
           </a:p>
         </p:txBody>
@@ -4508,7 +4508,7 @@
           <p:cNvPr id="6" name="text">
             <a:extLst xmlns:a="http://schemas.openxmlformats.org/drawingml/2006/main">
               <a:ext uri="{FF2B5EF4-FFF2-40B4-BE49-F238E27FC236}">
-                <a16:creationId xmlns:a16="http://schemas.microsoft.com/office/drawing/2014/main" id="{2EFE4F32-6B72-4B25-B13B-2F88D2785477}"/>
+                <a16:creationId xmlns:a16="http://schemas.microsoft.com/office/drawing/2014/main" id="{9CDBB418-964D-430F-A5BD-018FF9B0DE7C}"/>
               </a:ext>
             </a:extLst>
           </p:cNvPr>
@@ -4553,7 +4553,7 @@
           <p:cNvPr id="7" name="text">
             <a:extLst xmlns:a="http://schemas.openxmlformats.org/drawingml/2006/main">
               <a:ext uri="{FF2B5EF4-FFF2-40B4-BE49-F238E27FC236}">
-                <a16:creationId xmlns:a16="http://schemas.microsoft.com/office/drawing/2014/main" id="{BCA69CC1-BE20-4026-A1F6-E14745828977}"/>
+                <a16:creationId xmlns:a16="http://schemas.microsoft.com/office/drawing/2014/main" id="{51A10DC0-1304-42BD-85C8-92E4E0F608C2}"/>
               </a:ext>
             </a:extLst>
           </p:cNvPr>
@@ -4598,7 +4598,7 @@
           <p:cNvPr id="8" name="text">
             <a:extLst xmlns:a="http://schemas.openxmlformats.org/drawingml/2006/main">
               <a:ext uri="{FF2B5EF4-FFF2-40B4-BE49-F238E27FC236}">
-                <a16:creationId xmlns:a16="http://schemas.microsoft.com/office/drawing/2014/main" id="{8DEDA860-71BC-4489-A879-1C290DD1A9A5}"/>
+                <a16:creationId xmlns:a16="http://schemas.microsoft.com/office/drawing/2014/main" id="{C76F3D5B-1800-4C4F-8534-F3A92FE8E622}"/>
               </a:ext>
             </a:extLst>
           </p:cNvPr>
@@ -4643,7 +4643,7 @@
           <p:cNvPr id="9" name="text">
             <a:extLst xmlns:a="http://schemas.openxmlformats.org/drawingml/2006/main">
               <a:ext uri="{FF2B5EF4-FFF2-40B4-BE49-F238E27FC236}">
-                <a16:creationId xmlns:a16="http://schemas.microsoft.com/office/drawing/2014/main" id="{59A1396C-6111-4DB8-BD11-9F0E6B17697E}"/>
+                <a16:creationId xmlns:a16="http://schemas.microsoft.com/office/drawing/2014/main" id="{AD7F1EBA-0B27-41EE-943C-15CFEC6C43AC}"/>
               </a:ext>
             </a:extLst>
           </p:cNvPr>
@@ -4688,7 +4688,7 @@
           <p:cNvPr id="10" name="text">
             <a:extLst xmlns:a="http://schemas.openxmlformats.org/drawingml/2006/main">
               <a:ext uri="{FF2B5EF4-FFF2-40B4-BE49-F238E27FC236}">
-                <a16:creationId xmlns:a16="http://schemas.microsoft.com/office/drawing/2014/main" id="{8FECEFC9-9491-4D68-A56E-E4CE8DA89513}"/>
+                <a16:creationId xmlns:a16="http://schemas.microsoft.com/office/drawing/2014/main" id="{CBC55916-131F-4CB4-80C9-2D26E30BA8A3}"/>
               </a:ext>
             </a:extLst>
           </p:cNvPr>
@@ -4723,7 +4723,7 @@
                   <a:srgbClr val="526772"/>
                 </a:solidFill>
               </a:rPr>
-              <a:t>ModelSim: 22 CPU/PIC configurations   ·   Verilator: 16 benches with assertions</a:t>
+              <a:t>ModelSim: 39 CPU/PIC runs   ·   Verilator: 17 benches, 53 runs with assertions</a:t>
             </a:r>
           </a:p>
         </p:txBody>
@@ -4733,7 +4733,7 @@
           <p:cNvPr id="11" name="footer">
             <a:extLst xmlns:a="http://schemas.openxmlformats.org/drawingml/2006/main">
               <a:ext uri="{FF2B5EF4-FFF2-40B4-BE49-F238E27FC236}">
-                <a16:creationId xmlns:a16="http://schemas.microsoft.com/office/drawing/2014/main" id="{96BF5384-15F2-4576-A54C-CB09E103E739}"/>
+                <a16:creationId xmlns:a16="http://schemas.microsoft.com/office/drawing/2014/main" id="{43823DFA-4521-4608-ACA1-3BC50527436D}"/>
               </a:ext>
             </a:extLst>
           </p:cNvPr>
@@ -4776,7 +4776,7 @@
     </p:spTree>
     <p:extLst>
       <p:ext uri="{BB962C8B-B14F-4D97-AF65-F5344CB8AC3E}">
-        <p14:creationId xmlns:p14="http://schemas.microsoft.com/office/powerpoint/2010/main" val="361390711"/>
+        <p14:creationId xmlns:p14="http://schemas.microsoft.com/office/powerpoint/2010/main" val="301182399"/>
       </p:ext>
     </p:extLst>
   </p:cSld>
@@ -4800,7 +4800,7 @@
           <p:cNvPr id="1" name="slide-title">
             <a:extLst xmlns:a="http://schemas.openxmlformats.org/drawingml/2006/main">
               <a:ext uri="{FF2B5EF4-FFF2-40B4-BE49-F238E27FC236}">
-                <a16:creationId xmlns:a16="http://schemas.microsoft.com/office/drawing/2014/main" id="{810FCD1B-CBE3-407B-8C51-DF5EB934AEED}"/>
+                <a16:creationId xmlns:a16="http://schemas.microsoft.com/office/drawing/2014/main" id="{E939B9A5-4832-4D4B-A984-EF5105CF87ED}"/>
               </a:ext>
             </a:extLst>
           </p:cNvPr>
@@ -4845,7 +4845,7 @@
           <p:cNvPr id="2" name="">
             <a:extLst xmlns:a="http://schemas.openxmlformats.org/drawingml/2006/main">
               <a:ext uri="{FF2B5EF4-FFF2-40B4-BE49-F238E27FC236}">
-                <a16:creationId xmlns:a16="http://schemas.microsoft.com/office/drawing/2014/main" id="{1C020070-C1FC-4C27-912D-4C2189A58E4B}"/>
+                <a16:creationId xmlns:a16="http://schemas.microsoft.com/office/drawing/2014/main" id="{C96061DE-C4A2-4C67-BB31-4934B7C1682D}"/>
               </a:ext>
             </a:extLst>
           </p:cNvPr>
@@ -4882,10 +4882,10 @@
           <p:nvPr/>
         </p:nvPicPr>
         <p:blipFill>
-          <a:blip xmlns:r="http://schemas.openxmlformats.org/officeDocument/2006/relationships" xmlns:a="http://schemas.openxmlformats.org/drawingml/2006/main" r:embed="Rbb66eb9c8581494f">
+          <a:blip xmlns:r="http://schemas.openxmlformats.org/officeDocument/2006/relationships" xmlns:a="http://schemas.openxmlformats.org/drawingml/2006/main" r:embed="Rf267a54b79144dc4">
             <a:extLst>
               <a:ext uri="{96DAC541-7B7A-43D3-8B79-37D633B846F1}">
-                <asvg:svgBlip xmlns:asvg="http://schemas.microsoft.com/office/drawing/2016/SVG/main" r:embed="R03e5bc68fd7b4708"/>
+                <asvg:svgBlip xmlns:asvg="http://schemas.microsoft.com/office/drawing/2016/SVG/main" r:embed="R37a3ff6c965c49e8"/>
               </a:ext>
             </a:extLst>
           </a:blip>
@@ -4906,7 +4906,7 @@
           <p:cNvPr id="4" name="text">
             <a:extLst xmlns:a="http://schemas.openxmlformats.org/drawingml/2006/main">
               <a:ext uri="{FF2B5EF4-FFF2-40B4-BE49-F238E27FC236}">
-                <a16:creationId xmlns:a16="http://schemas.microsoft.com/office/drawing/2014/main" id="{103801F9-6464-4482-BF7D-4C694BB24FE2}"/>
+                <a16:creationId xmlns:a16="http://schemas.microsoft.com/office/drawing/2014/main" id="{23A25D23-FE7B-4DD2-B66C-FF21E3F180C7}"/>
               </a:ext>
             </a:extLst>
           </p:cNvPr>
@@ -4951,7 +4951,7 @@
           <p:cNvPr id="5" name="text">
             <a:extLst xmlns:a="http://schemas.openxmlformats.org/drawingml/2006/main">
               <a:ext uri="{FF2B5EF4-FFF2-40B4-BE49-F238E27FC236}">
-                <a16:creationId xmlns:a16="http://schemas.microsoft.com/office/drawing/2014/main" id="{D6DE4A36-CE56-4581-95FB-BB6564D75D5A}"/>
+                <a16:creationId xmlns:a16="http://schemas.microsoft.com/office/drawing/2014/main" id="{9C606D0E-8F1C-49F4-825C-2CA47E9AF33E}"/>
               </a:ext>
             </a:extLst>
           </p:cNvPr>
@@ -4996,7 +4996,7 @@
           <p:cNvPr id="6" name="text">
             <a:extLst xmlns:a="http://schemas.openxmlformats.org/drawingml/2006/main">
               <a:ext uri="{FF2B5EF4-FFF2-40B4-BE49-F238E27FC236}">
-                <a16:creationId xmlns:a16="http://schemas.microsoft.com/office/drawing/2014/main" id="{06A225F0-C4B5-4267-89DE-6BC4887DA1C5}"/>
+                <a16:creationId xmlns:a16="http://schemas.microsoft.com/office/drawing/2014/main" id="{221D044F-D190-4B7E-A848-3B08D057012C}"/>
               </a:ext>
             </a:extLst>
           </p:cNvPr>
@@ -5041,7 +5041,7 @@
           <p:cNvPr id="7" name="text">
             <a:extLst xmlns:a="http://schemas.openxmlformats.org/drawingml/2006/main">
               <a:ext uri="{FF2B5EF4-FFF2-40B4-BE49-F238E27FC236}">
-                <a16:creationId xmlns:a16="http://schemas.microsoft.com/office/drawing/2014/main" id="{01B4A088-C436-443D-AAC7-32B9D5149331}"/>
+                <a16:creationId xmlns:a16="http://schemas.microsoft.com/office/drawing/2014/main" id="{221C993A-E24D-40E8-9DB1-E9B4B37F6AE7}"/>
               </a:ext>
             </a:extLst>
           </p:cNvPr>
@@ -5086,7 +5086,7 @@
           <p:cNvPr id="8" name="text">
             <a:extLst xmlns:a="http://schemas.openxmlformats.org/drawingml/2006/main">
               <a:ext uri="{FF2B5EF4-FFF2-40B4-BE49-F238E27FC236}">
-                <a16:creationId xmlns:a16="http://schemas.microsoft.com/office/drawing/2014/main" id="{EC10D4BD-8B1B-42F4-AAF5-55C569016628}"/>
+                <a16:creationId xmlns:a16="http://schemas.microsoft.com/office/drawing/2014/main" id="{127D07FC-274F-4783-8465-7B7B3DCA1B75}"/>
               </a:ext>
             </a:extLst>
           </p:cNvPr>
@@ -5131,7 +5131,7 @@
           <p:cNvPr id="9" name="text">
             <a:extLst xmlns:a="http://schemas.openxmlformats.org/drawingml/2006/main">
               <a:ext uri="{FF2B5EF4-FFF2-40B4-BE49-F238E27FC236}">
-                <a16:creationId xmlns:a16="http://schemas.microsoft.com/office/drawing/2014/main" id="{6E49DBE2-D624-4187-88D6-65310C247037}"/>
+                <a16:creationId xmlns:a16="http://schemas.microsoft.com/office/drawing/2014/main" id="{9606BB60-5D9B-4D18-B55A-86B2B1CF5D37}"/>
               </a:ext>
             </a:extLst>
           </p:cNvPr>
@@ -5176,7 +5176,7 @@
           <p:cNvPr id="10" name="text">
             <a:extLst xmlns:a="http://schemas.openxmlformats.org/drawingml/2006/main">
               <a:ext uri="{FF2B5EF4-FFF2-40B4-BE49-F238E27FC236}">
-                <a16:creationId xmlns:a16="http://schemas.microsoft.com/office/drawing/2014/main" id="{FBC6A1DE-33B1-4C56-AADE-6310614150A2}"/>
+                <a16:creationId xmlns:a16="http://schemas.microsoft.com/office/drawing/2014/main" id="{F51851ED-4C1B-40D8-8E82-98747603A691}"/>
               </a:ext>
             </a:extLst>
           </p:cNvPr>
@@ -5221,7 +5221,7 @@
           <p:cNvPr id="11" name="footer">
             <a:extLst xmlns:a="http://schemas.openxmlformats.org/drawingml/2006/main">
               <a:ext uri="{FF2B5EF4-FFF2-40B4-BE49-F238E27FC236}">
-                <a16:creationId xmlns:a16="http://schemas.microsoft.com/office/drawing/2014/main" id="{3002E0D2-1077-4EE4-96A5-B4CB6DB3BD6C}"/>
+                <a16:creationId xmlns:a16="http://schemas.microsoft.com/office/drawing/2014/main" id="{E77726F9-70D7-4822-9BBC-74F8C1D61786}"/>
               </a:ext>
             </a:extLst>
           </p:cNvPr>
@@ -5264,7 +5264,7 @@
     </p:spTree>
     <p:extLst>
       <p:ext uri="{BB962C8B-B14F-4D97-AF65-F5344CB8AC3E}">
-        <p14:creationId xmlns:p14="http://schemas.microsoft.com/office/powerpoint/2010/main" val="947572809"/>
+        <p14:creationId xmlns:p14="http://schemas.microsoft.com/office/powerpoint/2010/main" val="23924059"/>
       </p:ext>
     </p:extLst>
   </p:cSld>
@@ -5288,7 +5288,7 @@
           <p:cNvPr id="1" name="slide-title">
             <a:extLst xmlns:a="http://schemas.openxmlformats.org/drawingml/2006/main">
               <a:ext uri="{FF2B5EF4-FFF2-40B4-BE49-F238E27FC236}">
-                <a16:creationId xmlns:a16="http://schemas.microsoft.com/office/drawing/2014/main" id="{6A87A5B0-90BC-4229-84DD-0680D71C80C5}"/>
+                <a16:creationId xmlns:a16="http://schemas.microsoft.com/office/drawing/2014/main" id="{7F6DAC90-4174-4732-BA38-191915D8DDC4}"/>
               </a:ext>
             </a:extLst>
           </p:cNvPr>
@@ -5333,7 +5333,7 @@
           <p:cNvPr id="2" name="">
             <a:extLst xmlns:a="http://schemas.openxmlformats.org/drawingml/2006/main">
               <a:ext uri="{FF2B5EF4-FFF2-40B4-BE49-F238E27FC236}">
-                <a16:creationId xmlns:a16="http://schemas.microsoft.com/office/drawing/2014/main" id="{8A864520-9F82-42DF-BBF9-AED9D3DBBB66}"/>
+                <a16:creationId xmlns:a16="http://schemas.microsoft.com/office/drawing/2014/main" id="{C420ED71-A6D0-41C7-B415-4ADF4D017910}"/>
               </a:ext>
             </a:extLst>
           </p:cNvPr>
@@ -5366,7 +5366,7 @@
           <p:cNvPr id="3" name="text">
             <a:extLst xmlns:a="http://schemas.openxmlformats.org/drawingml/2006/main">
               <a:ext uri="{FF2B5EF4-FFF2-40B4-BE49-F238E27FC236}">
-                <a16:creationId xmlns:a16="http://schemas.microsoft.com/office/drawing/2014/main" id="{3F965F7B-B992-4B37-8A74-94FD46515FF2}"/>
+                <a16:creationId xmlns:a16="http://schemas.microsoft.com/office/drawing/2014/main" id="{4A076174-1D68-4598-B9F4-F18BAA7DAE03}"/>
               </a:ext>
             </a:extLst>
           </p:cNvPr>
@@ -5411,7 +5411,7 @@
           <p:cNvPr id="4" name="text">
             <a:extLst xmlns:a="http://schemas.openxmlformats.org/drawingml/2006/main">
               <a:ext uri="{FF2B5EF4-FFF2-40B4-BE49-F238E27FC236}">
-                <a16:creationId xmlns:a16="http://schemas.microsoft.com/office/drawing/2014/main" id="{24D081FA-91DF-4898-BBF5-D2CDAEFE8B71}"/>
+                <a16:creationId xmlns:a16="http://schemas.microsoft.com/office/drawing/2014/main" id="{749970EB-2070-4862-9B4F-84E7E2A53410}"/>
               </a:ext>
             </a:extLst>
           </p:cNvPr>
@@ -5456,7 +5456,7 @@
           <p:cNvPr id="5" name="text">
             <a:extLst xmlns:a="http://schemas.openxmlformats.org/drawingml/2006/main">
               <a:ext uri="{FF2B5EF4-FFF2-40B4-BE49-F238E27FC236}">
-                <a16:creationId xmlns:a16="http://schemas.microsoft.com/office/drawing/2014/main" id="{17E2ED96-8159-4D00-941B-E604B8EFC3EA}"/>
+                <a16:creationId xmlns:a16="http://schemas.microsoft.com/office/drawing/2014/main" id="{209FA3BA-2A44-418B-AE37-EF0CECE618B8}"/>
               </a:ext>
             </a:extLst>
           </p:cNvPr>
@@ -5501,7 +5501,7 @@
           <p:cNvPr id="6" name="text">
             <a:extLst xmlns:a="http://schemas.openxmlformats.org/drawingml/2006/main">
               <a:ext uri="{FF2B5EF4-FFF2-40B4-BE49-F238E27FC236}">
-                <a16:creationId xmlns:a16="http://schemas.microsoft.com/office/drawing/2014/main" id="{BCCC8123-1916-4703-B341-551E78B0429D}"/>
+                <a16:creationId xmlns:a16="http://schemas.microsoft.com/office/drawing/2014/main" id="{3924346D-6143-487E-9CE5-636D8CD35188}"/>
               </a:ext>
             </a:extLst>
           </p:cNvPr>
@@ -5546,7 +5546,7 @@
           <p:cNvPr id="7" name="text">
             <a:extLst xmlns:a="http://schemas.openxmlformats.org/drawingml/2006/main">
               <a:ext uri="{FF2B5EF4-FFF2-40B4-BE49-F238E27FC236}">
-                <a16:creationId xmlns:a16="http://schemas.microsoft.com/office/drawing/2014/main" id="{964EDC6B-0120-443D-A0EB-490D0E352934}"/>
+                <a16:creationId xmlns:a16="http://schemas.microsoft.com/office/drawing/2014/main" id="{20511A43-E137-4D52-9F78-412C29BBCFD1}"/>
               </a:ext>
             </a:extLst>
           </p:cNvPr>
@@ -5591,7 +5591,7 @@
           <p:cNvPr id="8" name="text">
             <a:extLst xmlns:a="http://schemas.openxmlformats.org/drawingml/2006/main">
               <a:ext uri="{FF2B5EF4-FFF2-40B4-BE49-F238E27FC236}">
-                <a16:creationId xmlns:a16="http://schemas.microsoft.com/office/drawing/2014/main" id="{062D9DE2-97D3-4328-A402-D0B53E96789D}"/>
+                <a16:creationId xmlns:a16="http://schemas.microsoft.com/office/drawing/2014/main" id="{42875173-8D04-4F92-B5A4-4C5F766C1D2D}"/>
               </a:ext>
             </a:extLst>
           </p:cNvPr>
@@ -5636,7 +5636,7 @@
           <p:cNvPr id="9" name="text">
             <a:extLst xmlns:a="http://schemas.openxmlformats.org/drawingml/2006/main">
               <a:ext uri="{FF2B5EF4-FFF2-40B4-BE49-F238E27FC236}">
-                <a16:creationId xmlns:a16="http://schemas.microsoft.com/office/drawing/2014/main" id="{10628046-D82C-4F37-9C96-19924781258B}"/>
+                <a16:creationId xmlns:a16="http://schemas.microsoft.com/office/drawing/2014/main" id="{2E26516F-C207-40A6-BF06-2E5271965980}"/>
               </a:ext>
             </a:extLst>
           </p:cNvPr>
@@ -5681,7 +5681,7 @@
           <p:cNvPr id="10" name="text">
             <a:extLst xmlns:a="http://schemas.openxmlformats.org/drawingml/2006/main">
               <a:ext uri="{FF2B5EF4-FFF2-40B4-BE49-F238E27FC236}">
-                <a16:creationId xmlns:a16="http://schemas.microsoft.com/office/drawing/2014/main" id="{A4CE6466-E715-4BFF-9614-01BF1E61D14A}"/>
+                <a16:creationId xmlns:a16="http://schemas.microsoft.com/office/drawing/2014/main" id="{BDEF4E90-1CDD-4E2E-B0F8-2E9CF3562E8F}"/>
               </a:ext>
             </a:extLst>
           </p:cNvPr>
@@ -5726,7 +5726,7 @@
           <p:cNvPr id="11" name="">
             <a:extLst xmlns:a="http://schemas.openxmlformats.org/drawingml/2006/main">
               <a:ext uri="{FF2B5EF4-FFF2-40B4-BE49-F238E27FC236}">
-                <a16:creationId xmlns:a16="http://schemas.microsoft.com/office/drawing/2014/main" id="{B83E03A2-B8C9-47C1-A4F9-BA835F5AE972}"/>
+                <a16:creationId xmlns:a16="http://schemas.microsoft.com/office/drawing/2014/main" id="{8B3EC477-23B1-4F25-98F6-6817A5791E5B}"/>
               </a:ext>
             </a:extLst>
           </p:cNvPr>
@@ -5759,7 +5759,7 @@
           <p:cNvPr id="12" name="text">
             <a:extLst xmlns:a="http://schemas.openxmlformats.org/drawingml/2006/main">
               <a:ext uri="{FF2B5EF4-FFF2-40B4-BE49-F238E27FC236}">
-                <a16:creationId xmlns:a16="http://schemas.microsoft.com/office/drawing/2014/main" id="{41762174-5ED8-4A7C-AF08-7F57FF871E8B}"/>
+                <a16:creationId xmlns:a16="http://schemas.microsoft.com/office/drawing/2014/main" id="{21DB0EEE-E5BC-4D76-9919-3BDB137BCB0D}"/>
               </a:ext>
             </a:extLst>
           </p:cNvPr>
@@ -5804,7 +5804,7 @@
           <p:cNvPr id="13" name="footer">
             <a:extLst xmlns:a="http://schemas.openxmlformats.org/drawingml/2006/main">
               <a:ext uri="{FF2B5EF4-FFF2-40B4-BE49-F238E27FC236}">
-                <a16:creationId xmlns:a16="http://schemas.microsoft.com/office/drawing/2014/main" id="{32EF04DA-AA75-476B-AC08-580A83A01CE3}"/>
+                <a16:creationId xmlns:a16="http://schemas.microsoft.com/office/drawing/2014/main" id="{54915A50-8331-4AC3-89AD-294AE7D02CB4}"/>
               </a:ext>
             </a:extLst>
           </p:cNvPr>
@@ -5847,7 +5847,7 @@
     </p:spTree>
     <p:extLst>
       <p:ext uri="{BB962C8B-B14F-4D97-AF65-F5344CB8AC3E}">
-        <p14:creationId xmlns:p14="http://schemas.microsoft.com/office/powerpoint/2010/main" val="255434309"/>
+        <p14:creationId xmlns:p14="http://schemas.microsoft.com/office/powerpoint/2010/main" val="6566689"/>
       </p:ext>
     </p:extLst>
   </p:cSld>
